--- a/CN/Physical Layer.pptx
+++ b/CN/Physical Layer.pptx
@@ -259,7 +259,7 @@
           <a:p>
             <a:fld id="{FD594462-75B1-44C8-A601-DF603758CB8A}" type="datetimeFigureOut">
               <a:rPr lang="en-US" smtClean="0"/>
-              <a:t>7/21/2026</a:t>
+              <a:t>7/30/2026</a:t>
             </a:fld>
             <a:endParaRPr lang="en-US"/>
           </a:p>
@@ -437,7 +437,7 @@
           <a:p>
             <a:fld id="{AA31A3DE-9003-4A22-9DD6-37AD7365FE9E}" type="datetimeFigureOut">
               <a:rPr lang="en-US" smtClean="0"/>
-              <a:t>7/21/2026</a:t>
+              <a:t>7/30/2026</a:t>
             </a:fld>
             <a:endParaRPr lang="en-US"/>
           </a:p>
@@ -858,7 +858,7 @@
           <a:p>
             <a:fld id="{325B6676-6B8D-41AE-9731-411042636E71}" type="datetime1">
               <a:rPr lang="en-US" smtClean="0"/>
-              <a:t>7/21/2026</a:t>
+              <a:t>7/30/2026</a:t>
             </a:fld>
             <a:endParaRPr lang="en-US"/>
           </a:p>
@@ -1120,7 +1120,7 @@
           <a:p>
             <a:fld id="{57F08574-D638-4A51-8811-3E76E4CBC5C7}" type="datetime1">
               <a:rPr lang="en-US" smtClean="0"/>
-              <a:t>7/21/2026</a:t>
+              <a:t>7/30/2026</a:t>
             </a:fld>
             <a:endParaRPr lang="en-US"/>
           </a:p>
@@ -2295,7 +2295,7 @@
               <a:buChar char="•"/>
             </a:pPr>
             <a:r>
-              <a:rPr sz="1800" b="0">
+              <a:rPr sz="1800" b="0" dirty="0">
                 <a:solidFill>
                   <a:srgbClr val="333333"/>
                 </a:solidFill>
@@ -2312,7 +2312,7 @@
               <a:buChar char="•"/>
             </a:pPr>
             <a:r>
-              <a:rPr sz="1800" b="0">
+              <a:rPr sz="1800" b="0" dirty="0">
                 <a:solidFill>
                   <a:srgbClr val="333333"/>
                 </a:solidFill>
@@ -2366,7 +2366,7 @@
           <a:p>
             <a:pPr algn="ctr"/>
             <a:r>
-              <a:rPr sz="2000" b="1">
+              <a:rPr sz="2000" b="1" dirty="0">
                 <a:solidFill>
                   <a:srgbClr val="0E2841"/>
                 </a:solidFill>
@@ -2407,7 +2407,7 @@
               <a:buChar char="•"/>
             </a:pPr>
             <a:r>
-              <a:rPr sz="1500" b="0">
+              <a:rPr sz="1500" b="0" dirty="0">
                 <a:solidFill>
                   <a:srgbClr val="333333"/>
                 </a:solidFill>
@@ -2422,6 +2422,183 @@
   <p:clrMapOvr>
     <a:masterClrMapping/>
   </p:clrMapOvr>
+  <p:timing>
+    <p:tnLst>
+      <p:par>
+        <p:cTn id="1" dur="indefinite" restart="never" nodeType="tmRoot">
+          <p:childTnLst>
+            <p:seq concurrent="1" nextAc="seek">
+              <p:cTn id="2" dur="indefinite" nodeType="mainSeq">
+                <p:childTnLst>
+                  <p:par>
+                    <p:cTn id="3" fill="hold">
+                      <p:stCondLst>
+                        <p:cond delay="indefinite"/>
+                      </p:stCondLst>
+                      <p:childTnLst>
+                        <p:par>
+                          <p:cTn id="4" fill="hold">
+                            <p:stCondLst>
+                              <p:cond delay="0"/>
+                            </p:stCondLst>
+                            <p:childTnLst>
+                              <p:par>
+                                <p:cTn id="5" presetID="1" presetClass="entr" presetSubtype="0" fill="hold" nodeType="clickEffect">
+                                  <p:stCondLst>
+                                    <p:cond delay="0"/>
+                                  </p:stCondLst>
+                                  <p:childTnLst>
+                                    <p:set>
+                                      <p:cBhvr>
+                                        <p:cTn id="6" dur="1" fill="hold">
+                                          <p:stCondLst>
+                                            <p:cond delay="0"/>
+                                          </p:stCondLst>
+                                        </p:cTn>
+                                        <p:tgtEl>
+                                          <p:spTgt spid="3">
+                                            <p:txEl>
+                                              <p:pRg st="1" end="1"/>
+                                            </p:txEl>
+                                          </p:spTgt>
+                                        </p:tgtEl>
+                                        <p:attrNameLst>
+                                          <p:attrName>style.visibility</p:attrName>
+                                        </p:attrNameLst>
+                                      </p:cBhvr>
+                                      <p:to>
+                                        <p:strVal val="visible"/>
+                                      </p:to>
+                                    </p:set>
+                                  </p:childTnLst>
+                                </p:cTn>
+                              </p:par>
+                            </p:childTnLst>
+                          </p:cTn>
+                        </p:par>
+                      </p:childTnLst>
+                    </p:cTn>
+                  </p:par>
+                  <p:par>
+                    <p:cTn id="7" fill="hold">
+                      <p:stCondLst>
+                        <p:cond delay="indefinite"/>
+                      </p:stCondLst>
+                      <p:childTnLst>
+                        <p:par>
+                          <p:cTn id="8" fill="hold">
+                            <p:stCondLst>
+                              <p:cond delay="0"/>
+                            </p:stCondLst>
+                            <p:childTnLst>
+                              <p:par>
+                                <p:cTn id="9" presetID="1" presetClass="entr" presetSubtype="0" fill="hold" nodeType="clickEffect">
+                                  <p:stCondLst>
+                                    <p:cond delay="0"/>
+                                  </p:stCondLst>
+                                  <p:childTnLst>
+                                    <p:set>
+                                      <p:cBhvr>
+                                        <p:cTn id="10" dur="1" fill="hold">
+                                          <p:stCondLst>
+                                            <p:cond delay="0"/>
+                                          </p:stCondLst>
+                                        </p:cTn>
+                                        <p:tgtEl>
+                                          <p:spTgt spid="4">
+                                            <p:txEl>
+                                              <p:pRg st="0" end="0"/>
+                                            </p:txEl>
+                                          </p:spTgt>
+                                        </p:tgtEl>
+                                        <p:attrNameLst>
+                                          <p:attrName>style.visibility</p:attrName>
+                                        </p:attrNameLst>
+                                      </p:cBhvr>
+                                      <p:to>
+                                        <p:strVal val="visible"/>
+                                      </p:to>
+                                    </p:set>
+                                  </p:childTnLst>
+                                </p:cTn>
+                              </p:par>
+                            </p:childTnLst>
+                          </p:cTn>
+                        </p:par>
+                      </p:childTnLst>
+                    </p:cTn>
+                  </p:par>
+                  <p:par>
+                    <p:cTn id="11" fill="hold">
+                      <p:stCondLst>
+                        <p:cond delay="indefinite"/>
+                      </p:stCondLst>
+                      <p:childTnLst>
+                        <p:par>
+                          <p:cTn id="12" fill="hold">
+                            <p:stCondLst>
+                              <p:cond delay="0"/>
+                            </p:stCondLst>
+                            <p:childTnLst>
+                              <p:par>
+                                <p:cTn id="13" presetID="1" presetClass="entr" presetSubtype="0" fill="hold" nodeType="clickEffect">
+                                  <p:stCondLst>
+                                    <p:cond delay="0"/>
+                                  </p:stCondLst>
+                                  <p:childTnLst>
+                                    <p:set>
+                                      <p:cBhvr>
+                                        <p:cTn id="14" dur="1" fill="hold">
+                                          <p:stCondLst>
+                                            <p:cond delay="0"/>
+                                          </p:stCondLst>
+                                        </p:cTn>
+                                        <p:tgtEl>
+                                          <p:spTgt spid="5">
+                                            <p:txEl>
+                                              <p:pRg st="0" end="0"/>
+                                            </p:txEl>
+                                          </p:spTgt>
+                                        </p:tgtEl>
+                                        <p:attrNameLst>
+                                          <p:attrName>style.visibility</p:attrName>
+                                        </p:attrNameLst>
+                                      </p:cBhvr>
+                                      <p:to>
+                                        <p:strVal val="visible"/>
+                                      </p:to>
+                                    </p:set>
+                                  </p:childTnLst>
+                                </p:cTn>
+                              </p:par>
+                            </p:childTnLst>
+                          </p:cTn>
+                        </p:par>
+                      </p:childTnLst>
+                    </p:cTn>
+                  </p:par>
+                </p:childTnLst>
+              </p:cTn>
+              <p:prevCondLst>
+                <p:cond evt="onPrev" delay="0">
+                  <p:tgtEl>
+                    <p:sldTgt/>
+                  </p:tgtEl>
+                </p:cond>
+              </p:prevCondLst>
+              <p:nextCondLst>
+                <p:cond evt="onNext" delay="0">
+                  <p:tgtEl>
+                    <p:sldTgt/>
+                  </p:tgtEl>
+                </p:cond>
+              </p:nextCondLst>
+            </p:seq>
+          </p:childTnLst>
+        </p:cTn>
+      </p:par>
+    </p:tnLst>
+  </p:timing>
 </p:sld>
 </file>
 
@@ -2698,7 +2875,7 @@
         <p:spPr>
           <a:xfrm>
             <a:off x="548640" y="1737360"/>
-            <a:ext cx="11091672" cy="2831544"/>
+            <a:ext cx="11091672" cy="3229089"/>
           </a:xfrm>
           <a:prstGeom prst="rect">
             <a:avLst/>
@@ -2799,8 +2976,22 @@
               <a:buFont typeface="Arial"/>
               <a:buChar char="•"/>
             </a:pPr>
-            <a:r>
-              <a:rPr sz="2000" b="0" dirty="0">
+            <a:endParaRPr lang="en-US" sz="2000" b="1" dirty="0">
+              <a:solidFill>
+                <a:srgbClr val="333333"/>
+              </a:solidFill>
+            </a:endParaRPr>
+          </a:p>
+          <a:p>
+            <a:pPr marL="228600" indent="-228600">
+              <a:spcAft>
+                <a:spcPts val="700"/>
+              </a:spcAft>
+              <a:buFont typeface="Arial"/>
+              <a:buChar char="•"/>
+            </a:pPr>
+            <a:r>
+              <a:rPr sz="2000" b="1" dirty="0">
                 <a:solidFill>
                   <a:srgbClr val="333333"/>
                 </a:solidFill>
@@ -2815,6 +3006,85 @@
   <p:clrMapOvr>
     <a:masterClrMapping/>
   </p:clrMapOvr>
+  <p:timing>
+    <p:tnLst>
+      <p:par>
+        <p:cTn id="1" dur="indefinite" restart="never" nodeType="tmRoot">
+          <p:childTnLst>
+            <p:seq concurrent="1" nextAc="seek">
+              <p:cTn id="2" dur="indefinite" nodeType="mainSeq">
+                <p:childTnLst>
+                  <p:par>
+                    <p:cTn id="3" fill="hold">
+                      <p:stCondLst>
+                        <p:cond delay="indefinite"/>
+                      </p:stCondLst>
+                      <p:childTnLst>
+                        <p:par>
+                          <p:cTn id="4" fill="hold">
+                            <p:stCondLst>
+                              <p:cond delay="0"/>
+                            </p:stCondLst>
+                            <p:childTnLst>
+                              <p:par>
+                                <p:cTn id="5" presetID="1" presetClass="entr" presetSubtype="0" fill="hold" nodeType="clickEffect">
+                                  <p:stCondLst>
+                                    <p:cond delay="0"/>
+                                  </p:stCondLst>
+                                  <p:childTnLst>
+                                    <p:set>
+                                      <p:cBhvr>
+                                        <p:cTn id="6" dur="1" fill="hold">
+                                          <p:stCondLst>
+                                            <p:cond delay="0"/>
+                                          </p:stCondLst>
+                                        </p:cTn>
+                                        <p:tgtEl>
+                                          <p:spTgt spid="3">
+                                            <p:txEl>
+                                              <p:pRg st="5" end="5"/>
+                                            </p:txEl>
+                                          </p:spTgt>
+                                        </p:tgtEl>
+                                        <p:attrNameLst>
+                                          <p:attrName>style.visibility</p:attrName>
+                                        </p:attrNameLst>
+                                      </p:cBhvr>
+                                      <p:to>
+                                        <p:strVal val="visible"/>
+                                      </p:to>
+                                    </p:set>
+                                  </p:childTnLst>
+                                </p:cTn>
+                              </p:par>
+                            </p:childTnLst>
+                          </p:cTn>
+                        </p:par>
+                      </p:childTnLst>
+                    </p:cTn>
+                  </p:par>
+                </p:childTnLst>
+              </p:cTn>
+              <p:prevCondLst>
+                <p:cond evt="onPrev" delay="0">
+                  <p:tgtEl>
+                    <p:sldTgt/>
+                  </p:tgtEl>
+                </p:cond>
+              </p:prevCondLst>
+              <p:nextCondLst>
+                <p:cond evt="onNext" delay="0">
+                  <p:tgtEl>
+                    <p:sldTgt/>
+                  </p:tgtEl>
+                </p:cond>
+              </p:nextCondLst>
+            </p:seq>
+          </p:childTnLst>
+        </p:cTn>
+      </p:par>
+    </p:tnLst>
+  </p:timing>
 </p:sld>
 </file>
 
@@ -2986,7 +3256,23 @@
                   <a:srgbClr val="333333"/>
                 </a:solidFill>
               </a:rPr>
-              <a:t>The bandwidth-delay product defines the number of bits that can fill the link at any one time — a key factor in network buffering and flow control.</a:t>
+              <a:t>The bandwidth-delay product defines the number of bits that can fill the link at any one time </a:t>
+            </a:r>
+            <a:r>
+              <a:rPr lang="en-US" sz="2400" b="0" dirty="0">
+                <a:solidFill>
+                  <a:srgbClr val="333333"/>
+                </a:solidFill>
+              </a:rPr>
+              <a:t>-</a:t>
+            </a:r>
+            <a:r>
+              <a:rPr sz="2400" b="0" dirty="0">
+                <a:solidFill>
+                  <a:srgbClr val="333333"/>
+                </a:solidFill>
+              </a:rPr>
+              <a:t> a key factor in network buffering and flow control.</a:t>
             </a:r>
           </a:p>
         </p:txBody>
@@ -5115,7 +5401,39 @@
                   <a:srgbClr val="333333"/>
                 </a:solidFill>
               </a:rPr>
-              <a:t>A digital signal can have more than two levels — in which case each level represents more than 1 bit.</a:t>
+              <a:t>A digital signal can have more than two </a:t>
+            </a:r>
+            <a:r>
+              <a:rPr sz="2400" b="0">
+                <a:solidFill>
+                  <a:srgbClr val="333333"/>
+                </a:solidFill>
+              </a:rPr>
+              <a:t>levels </a:t>
+            </a:r>
+            <a:r>
+              <a:rPr lang="en-US" sz="2400" b="0">
+                <a:solidFill>
+                  <a:srgbClr val="333333"/>
+                </a:solidFill>
+              </a:rPr>
+              <a:t>-</a:t>
+            </a:r>
+            <a:r>
+              <a:rPr sz="2400" b="0">
+                <a:solidFill>
+                  <a:srgbClr val="333333"/>
+                </a:solidFill>
+              </a:rPr>
+              <a:t> </a:t>
+            </a:r>
+            <a:r>
+              <a:rPr sz="2400" b="0" dirty="0">
+                <a:solidFill>
+                  <a:srgbClr val="333333"/>
+                </a:solidFill>
+              </a:rPr>
+              <a:t>in which case each level represents more than 1 bit.</a:t>
             </a:r>
           </a:p>
         </p:txBody>
